--- a/docs/support_soutenance_repetition.pptx
+++ b/docs/support_soutenance_repetition.pptx
@@ -3101,38 +3101,48 @@
           </a:p>
           <a:p>
             <a:r>
-              <a:t>- Ce qui a tranché : la LANGUE du message d'erreur</a:t>
-            </a:r>
-          </a:p>
-          <a:p>
-            <a:r>
-              <a:t>- L'image du conteneur est une Alpine en locale C : elle ne peut répondre qu'en anglais ASCII</a:t>
-            </a:r>
-          </a:p>
-          <a:p>
-            <a:r>
-              <a:t>- Un message en français accentué prouvait donc que l'interlocuteur n'était pas le conteneur</a:t>
-            </a:r>
-          </a:p>
-          <a:p>
-            <a:r>
-              <a:t>- Trois scénarios de correction pesés, dont deux écartés pour leurs effets de bord</a:t>
-            </a:r>
-          </a:p>
-          <a:p>
-            <a:r>
-              <a:t>- Retenu : publier sur le port hôte 5433, et écrire dans le fichier pourquoi ce n'est pas 5432</a:t>
+              <a:t>- Ce qui a tranché : la LANGUE du message d'erreur, devenue empreinte du serveur</a:t>
+            </a:r>
+          </a:p>
+          <a:p>
+            <a:r>
+              <a:t>- Une Alpine en locale C ne peut répondre qu'en anglais ASCII : le français prouvait l'imposture</a:t>
+            </a:r>
+          </a:p>
+          <a:p>
+            <a:r>
+              <a:t>- Communication, immédiat : mention en daily, tout poste avec un PostgreSQL local se bloquera pareil</a:t>
+            </a:r>
+          </a:p>
+          <a:p>
+            <a:r>
+              <a:t>- Puis un prérequis ajouté à la procédure d'installation, et cette entrée de journal pour la trace</a:t>
+            </a:r>
+          </a:p>
+          <a:p>
+            <a:r>
+              <a:t>- Résultat vérifié par l'exécution : 15 titres écrits, chaîne complète, rejeu idempotent à 0 inséré</a:t>
             </a:r>
           </a:p>
           <a:p/>
           <a:p>
             <a:r>
-              <a:t>C'est le cœur du livrable C4.4.2 : la nature du problème, les actions selon les</a:t>
-            </a:r>
-          </a:p>
-          <a:p>
-            <a:r>
-              <a:t>scénarios, la communication, les résultats attendus.</a:t>
+              <a:t>C'est le cœur du livrable C4.4.2, et la grille y attend quatre choses : la</a:t>
+            </a:r>
+          </a:p>
+          <a:p>
+            <a:r>
+              <a:t>nature du problème, les actions selon les scénarios, **la communication aux</a:t>
+            </a:r>
+          </a:p>
+          <a:p>
+            <a:r>
+              <a:t>parties prenantes**, et les résultats. La troisième est celle que les candidats</a:t>
+            </a:r>
+          </a:p>
+          <a:p>
+            <a:r>
+              <a:t>oublient le plus souvent ; elle est ici en deux puces, immédiat puis durable.</a:t>
             </a:r>
           </a:p>
           <a:p/>
@@ -3144,6 +3154,32 @@
           <a:p>
             <a:r>
               <a:t>a servi d'empreinte pour identifier quel serveur répondait. Le dire ainsi.</a:t>
+            </a:r>
+          </a:p>
+          <a:p/>
+          <a:p>
+            <a:r>
+              <a:t>Fermer sur la phrase de résultat que la grille demande : **la méthode a résolu</a:t>
+            </a:r>
+          </a:p>
+          <a:p>
+            <a:r>
+              <a:t>l'incident**, et la vérification n'a pas été l'absence d'erreur mais l'exécution</a:t>
+            </a:r>
+          </a:p>
+          <a:p>
+            <a:r>
+              <a:t>réelle de la chaîne. Ajouter que le port 5433 est commenté dans</a:t>
+            </a:r>
+          </a:p>
+          <a:p>
+            <a:r>
+              <a:t>`docker-compose.yml` pour que personne ne « corrige » l'anomalie apparente et ne</a:t>
+            </a:r>
+          </a:p>
+          <a:p>
+            <a:r>
+              <a:t>réintroduise l'incident.</a:t>
             </a:r>
           </a:p>
           <a:p/>
@@ -3564,6 +3600,22 @@
           <a:p>
             <a:r>
               <a:t>couche Bronze en PostgreSQL plutôt qu'en stockage objet.</a:t>
+            </a:r>
+          </a:p>
+          <a:p/>
+          <a:p>
+            <a:r>
+              <a:t>La grille demande que ce rapport **permette de cadrer le travail de conception**.</a:t>
+            </a:r>
+          </a:p>
+          <a:p>
+            <a:r>
+              <a:t>Le dire en quittant la diapositive, avec un exemple et non en général : c'est</a:t>
+            </a:r>
+          </a:p>
+          <a:p>
+            <a:r>
+              <a:t>cette analyse qui a écarté le stockage objet, et non un arbitrage pris plus tard.</a:t>
             </a:r>
           </a:p>
           <a:p/>
@@ -25287,7 +25339,7 @@
         <p:spPr>
           <a:xfrm>
             <a:off x="896112" y="1796796"/>
-            <a:ext cx="10637215" cy="888796"/>
+            <a:ext cx="10637215" cy="740664"/>
           </a:xfrm>
           <a:prstGeom prst="rect">
             <a:avLst/>
@@ -25328,7 +25380,7 @@
         </p:nvSpPr>
         <p:spPr>
           <a:xfrm>
-            <a:off x="658368" y="2749600"/>
+            <a:off x="658368" y="2604516"/>
             <a:ext cx="68580" cy="68580"/>
           </a:xfrm>
           <a:prstGeom prst="rect">
@@ -25372,8 +25424,8 @@
         </p:nvSpPr>
         <p:spPr>
           <a:xfrm>
-            <a:off x="896112" y="2667304"/>
-            <a:ext cx="10637215" cy="888796"/>
+            <a:off x="896112" y="2522220"/>
+            <a:ext cx="10637215" cy="740664"/>
           </a:xfrm>
           <a:prstGeom prst="rect">
             <a:avLst/>
@@ -25414,7 +25466,7 @@
         </p:nvSpPr>
         <p:spPr>
           <a:xfrm>
-            <a:off x="658368" y="3620109"/>
+            <a:off x="658368" y="3329940"/>
             <a:ext cx="68580" cy="68580"/>
           </a:xfrm>
           <a:prstGeom prst="rect">
@@ -25458,8 +25510,8 @@
         </p:nvSpPr>
         <p:spPr>
           <a:xfrm>
-            <a:off x="896112" y="3537813"/>
-            <a:ext cx="10637215" cy="888796"/>
+            <a:off x="896112" y="3247644"/>
+            <a:ext cx="10637215" cy="740664"/>
           </a:xfrm>
           <a:prstGeom prst="rect">
             <a:avLst/>
@@ -25500,7 +25552,7 @@
         </p:nvSpPr>
         <p:spPr>
           <a:xfrm>
-            <a:off x="658368" y="4490618"/>
+            <a:off x="658368" y="4055364"/>
             <a:ext cx="68580" cy="68580"/>
           </a:xfrm>
           <a:prstGeom prst="rect">
@@ -25544,8 +25596,8 @@
         </p:nvSpPr>
         <p:spPr>
           <a:xfrm>
-            <a:off x="896112" y="4408322"/>
-            <a:ext cx="10637215" cy="888796"/>
+            <a:off x="896112" y="3973068"/>
+            <a:ext cx="10637215" cy="740664"/>
           </a:xfrm>
           <a:prstGeom prst="rect">
             <a:avLst/>
@@ -25586,7 +25638,7 @@
         </p:nvSpPr>
         <p:spPr>
           <a:xfrm>
-            <a:off x="658368" y="5361127"/>
+            <a:off x="658368" y="4780788"/>
             <a:ext cx="68580" cy="68580"/>
           </a:xfrm>
           <a:prstGeom prst="rect">
@@ -25630,8 +25682,8 @@
         </p:nvSpPr>
         <p:spPr>
           <a:xfrm>
-            <a:off x="896112" y="5278831"/>
-            <a:ext cx="10637215" cy="888796"/>
+            <a:off x="896112" y="4698492"/>
+            <a:ext cx="10637215" cy="740664"/>
           </a:xfrm>
           <a:prstGeom prst="rect">
             <a:avLst/>
@@ -25672,8 +25724,8 @@
         </p:nvSpPr>
         <p:spPr>
           <a:xfrm>
-            <a:off x="658368" y="6291072"/>
-            <a:ext cx="28000" cy="146304"/>
+            <a:off x="658368" y="5506212"/>
+            <a:ext cx="68580" cy="68580"/>
           </a:xfrm>
           <a:prstGeom prst="rect">
             <a:avLst/>
@@ -25716,8 +25768,8 @@
         </p:nvSpPr>
         <p:spPr>
           <a:xfrm>
-            <a:off x="786384" y="6254496"/>
-            <a:ext cx="8229600" cy="274320"/>
+            <a:off x="896112" y="5423916"/>
+            <a:ext cx="10637215" cy="740664"/>
           </a:xfrm>
           <a:prstGeom prst="rect">
             <a:avLst/>
@@ -25731,6 +25783,92 @@
           <a:lstStyle/>
           <a:p>
             <a:pPr algn="l">
+              <a:lnSpc>
+                <a:spcPct val="115000"/>
+              </a:lnSpc>
+              <a:spcBef>
+                <a:spcPts val="0"/>
+              </a:spcBef>
+            </a:pPr>
+            <a:r>
+              <a:rPr sz="1750" b="0">
+                <a:solidFill>
+                  <a:srgbClr val="0B0B0B"/>
+                </a:solidFill>
+                <a:latin typeface="Segoe UI"/>
+              </a:rPr>
+              <a:t>Ce cadrage a décidé la suite : couche Bronze en PostgreSQL et non en stockage objet, entrepôt dimensionné XS</a:t>
+            </a:r>
+          </a:p>
+        </p:txBody>
+      </p:sp>
+      <p:sp>
+        <p:nvSpPr>
+          <p:cNvPr id="17" name="Rectangle 16"/>
+          <p:cNvSpPr/>
+          <p:nvPr/>
+        </p:nvSpPr>
+        <p:spPr>
+          <a:xfrm>
+            <a:off x="658368" y="6291072"/>
+            <a:ext cx="28000" cy="146304"/>
+          </a:xfrm>
+          <a:prstGeom prst="rect">
+            <a:avLst/>
+          </a:prstGeom>
+          <a:solidFill>
+            <a:srgbClr val="2A78D6"/>
+          </a:solidFill>
+          <a:ln>
+            <a:noFill/>
+          </a:ln>
+          <a:effectLst/>
+        </p:spPr>
+        <p:style>
+          <a:lnRef idx="1">
+            <a:schemeClr val="accent1"/>
+          </a:lnRef>
+          <a:fillRef idx="3">
+            <a:schemeClr val="accent1"/>
+          </a:fillRef>
+          <a:effectRef idx="2">
+            <a:schemeClr val="accent1"/>
+          </a:effectRef>
+          <a:fontRef idx="minor">
+            <a:schemeClr val="lt1"/>
+          </a:fontRef>
+        </p:style>
+        <p:txBody>
+          <a:bodyPr rtlCol="0" anchor="ctr"/>
+          <a:lstStyle/>
+          <a:p>
+            <a:pPr algn="ctr"/>
+          </a:p>
+        </p:txBody>
+      </p:sp>
+      <p:sp>
+        <p:nvSpPr>
+          <p:cNvPr id="18" name="TextBox 17"/>
+          <p:cNvSpPr txBox="1"/>
+          <p:nvPr/>
+        </p:nvSpPr>
+        <p:spPr>
+          <a:xfrm>
+            <a:off x="786384" y="6254496"/>
+            <a:ext cx="8229600" cy="274320"/>
+          </a:xfrm>
+          <a:prstGeom prst="rect">
+            <a:avLst/>
+          </a:prstGeom>
+          <a:noFill/>
+        </p:spPr>
+        <p:txBody>
+          <a:bodyPr wrap="square" lIns="0" rIns="0" tIns="0" bIns="0">
+            <a:spAutoFit/>
+          </a:bodyPr>
+          <a:lstStyle/>
+          <a:p>
+            <a:pPr algn="l">
               <a:spcBef>
                 <a:spcPts val="0"/>
               </a:spcBef>
@@ -25749,7 +25887,7 @@
       </p:sp>
       <p:sp>
         <p:nvSpPr>
-          <p:cNvPr id="17" name="TextBox 16"/>
+          <p:cNvPr id="19" name="TextBox 18"/>
           <p:cNvSpPr txBox="1"/>
           <p:nvPr/>
         </p:nvSpPr>

--- a/docs/support_soutenance_repetition.pptx
+++ b/docs/support_soutenance_repetition.pptx
@@ -16460,52 +16460,30 @@
           </a:p>
         </p:txBody>
       </p:sp>
-      <p:sp>
-        <p:nvSpPr>
-          <p:cNvPr id="5" name="Rounded Rectangle 4"/>
-          <p:cNvSpPr/>
-          <p:nvPr/>
-        </p:nvSpPr>
-        <p:spPr>
-          <a:xfrm>
-            <a:off x="658368" y="1755648"/>
-            <a:ext cx="10874959" cy="4059936"/>
-          </a:xfrm>
-          <a:prstGeom prst="roundRect">
-            <a:avLst/>
-          </a:prstGeom>
-          <a:solidFill>
-            <a:srgbClr val="F1F2F4"/>
-          </a:solidFill>
-          <a:ln w="17780">
-            <a:solidFill>
-              <a:srgbClr val="C9CED5"/>
-            </a:solidFill>
-          </a:ln>
-          <a:effectLst/>
-        </p:spPr>
-        <p:style>
-          <a:lnRef idx="1">
-            <a:schemeClr val="accent1"/>
-          </a:lnRef>
-          <a:fillRef idx="3">
-            <a:schemeClr val="accent1"/>
-          </a:fillRef>
-          <a:effectRef idx="2">
-            <a:schemeClr val="accent1"/>
-          </a:effectRef>
-          <a:fontRef idx="minor">
-            <a:schemeClr val="lt1"/>
-          </a:fontRef>
-        </p:style>
-        <p:txBody>
-          <a:bodyPr rtlCol="0" anchor="ctr"/>
-          <a:lstStyle/>
-          <a:p>
-            <a:pPr algn="ctr"/>
-          </a:p>
-        </p:txBody>
-      </p:sp>
+      <p:pic>
+        <p:nvPicPr>
+          <p:cNvPr id="5" name="Picture 4" descr="github_actions.png"/>
+          <p:cNvPicPr>
+            <a:picLocks noChangeAspect="1"/>
+          </p:cNvPicPr>
+          <p:nvPr/>
+        </p:nvPicPr>
+        <p:blipFill>
+          <a:blip r:embed="rId2"/>
+          <a:stretch>
+            <a:fillRect/>
+          </a:stretch>
+        </p:blipFill>
+        <p:spPr>
+          <a:xfrm>
+            <a:off x="658368" y="1959597"/>
+            <a:ext cx="10874959" cy="3652038"/>
+          </a:xfrm>
+          <a:prstGeom prst="rect">
+            <a:avLst/>
+          </a:prstGeom>
+        </p:spPr>
+      </p:pic>
       <p:sp>
         <p:nvSpPr>
           <p:cNvPr id="6" name="TextBox 5"/>
@@ -16514,8 +16492,8 @@
         </p:nvSpPr>
         <p:spPr>
           <a:xfrm>
-            <a:off x="1572768" y="3282696"/>
-            <a:ext cx="9046159" cy="1097280"/>
+            <a:off x="658368" y="5888736"/>
+            <a:ext cx="10874959" cy="310896"/>
           </a:xfrm>
           <a:prstGeom prst="rect">
             <a:avLst/>
@@ -16528,89 +16506,18 @@
           </a:bodyPr>
           <a:lstStyle/>
           <a:p>
-            <a:pPr algn="ctr">
-              <a:spcBef>
-                <a:spcPts val="0"/>
-              </a:spcBef>
-            </a:pPr>
-            <a:r>
-              <a:rPr sz="1700" b="1">
-                <a:solidFill>
-                  <a:srgbClr val="EB6834"/>
+            <a:pPr algn="l">
+              <a:spcBef>
+                <a:spcPts val="0"/>
+              </a:spcBef>
+            </a:pPr>
+            <a:r>
+              <a:rPr sz="1300" b="0">
+                <a:solidFill>
+                  <a:srgbClr val="52514E"/>
                 </a:solidFill>
                 <a:latin typeface="Segoe UI"/>
               </a:rPr>
-              <a:t>Capture attendue</a:t>
-            </a:r>
-          </a:p>
-          <a:p>
-            <a:pPr algn="ctr">
-              <a:spcBef>
-                <a:spcPts val="1000"/>
-              </a:spcBef>
-            </a:pPr>
-            <a:r>
-              <a:rPr sz="1300" b="0">
-                <a:solidFill>
-                  <a:srgbClr val="52514E"/>
-                </a:solidFill>
-                <a:latin typeface="Segoe UI"/>
-              </a:rPr>
-              <a:t>docs/captures/github_actions.png</a:t>
-            </a:r>
-          </a:p>
-          <a:p>
-            <a:pPr algn="ctr">
-              <a:spcBef>
-                <a:spcPts val="500"/>
-              </a:spcBef>
-            </a:pPr>
-            <a:r>
-              <a:rPr sz="1150" b="0">
-                <a:solidFill>
-                  <a:srgbClr val="52514E"/>
-                </a:solidFill>
-                <a:latin typeface="Segoe UI"/>
-              </a:rPr>
-              <a:t>Deposer l'image, puis relancer le generateur</a:t>
-            </a:r>
-          </a:p>
-        </p:txBody>
-      </p:sp>
-      <p:sp>
-        <p:nvSpPr>
-          <p:cNvPr id="7" name="TextBox 6"/>
-          <p:cNvSpPr txBox="1"/>
-          <p:nvPr/>
-        </p:nvSpPr>
-        <p:spPr>
-          <a:xfrm>
-            <a:off x="658368" y="5888736"/>
-            <a:ext cx="10874959" cy="310896"/>
-          </a:xfrm>
-          <a:prstGeom prst="rect">
-            <a:avLst/>
-          </a:prstGeom>
-          <a:noFill/>
-        </p:spPr>
-        <p:txBody>
-          <a:bodyPr wrap="square" lIns="0" rIns="0" tIns="0" bIns="0">
-            <a:spAutoFit/>
-          </a:bodyPr>
-          <a:lstStyle/>
-          <a:p>
-            <a:pPr algn="l">
-              <a:spcBef>
-                <a:spcPts val="0"/>
-              </a:spcBef>
-            </a:pPr>
-            <a:r>
-              <a:rPr sz="1300" b="0">
-                <a:solidFill>
-                  <a:srgbClr val="52514E"/>
-                </a:solidFill>
-                <a:latin typeface="Segoe UI"/>
-              </a:rPr>
               <a:t>Le dernier run de la branche principale, six etages au vert.</a:t>
             </a:r>
           </a:p>
@@ -16618,7 +16525,7 @@
       </p:sp>
       <p:sp>
         <p:nvSpPr>
-          <p:cNvPr id="8" name="Rectangle 7"/>
+          <p:cNvPr id="7" name="Rectangle 6"/>
           <p:cNvSpPr/>
           <p:nvPr/>
         </p:nvSpPr>
@@ -16662,7 +16569,7 @@
       </p:sp>
       <p:sp>
         <p:nvSpPr>
-          <p:cNvPr id="9" name="TextBox 8"/>
+          <p:cNvPr id="8" name="TextBox 7"/>
           <p:cNvSpPr txBox="1"/>
           <p:nvPr/>
         </p:nvSpPr>
@@ -16701,7 +16608,7 @@
       </p:sp>
       <p:sp>
         <p:nvSpPr>
-          <p:cNvPr id="10" name="TextBox 9"/>
+          <p:cNvPr id="9" name="TextBox 8"/>
           <p:cNvSpPr txBox="1"/>
           <p:nvPr/>
         </p:nvSpPr>

--- a/docs/support_soutenance_repetition.pptx
+++ b/docs/support_soutenance_repetition.pptx
@@ -673,6 +673,14 @@
               <a:t>   table fact_prices`</a:t>
             </a:r>
           </a:p>
+          <a:p/>
+          <a:p>
+            <a:r>
+              <a:t>docker exec gamelens-postgres psql -U dashboard_viewer -d gamelens -c 'SELECT count(*) FROM mart.fact_prices;'</a:t>
+            </a:r>
+          </a:p>
+          <a:p/>
+          <a:p/>
           <a:p>
             <a:r>
               <a:t>2. le même rôle interroge `mart.v_popularity_dashboard` : trois lignes de</a:t>
@@ -686,14 +694,10 @@
           <a:p/>
           <a:p>
             <a:r>
-              <a:t>Dire pendant que ça tourne : « le cloisonnement se prouve mieux par un refus que</a:t>
-            </a:r>
-          </a:p>
-          <a:p>
-            <a:r>
-              <a:t>par une matrice de droits ».</a:t>
-            </a:r>
-          </a:p>
+              <a:t>docker exec gamelens-postgres psql -U dashboard_viewer -d gamelens -c 'SELECT unified_name, day, avg_player_count, avg_viewer_count FROM mart.v_popularity_dashboard ORDER BY day DESC, avg_player_count DESC LIMIT 3;'</a:t>
+            </a:r>
+          </a:p>
+          <a:p/>
           <a:p/>
           <a:p>
             <a:r>
@@ -18137,52 +18141,30 @@
           </a:p>
         </p:txBody>
       </p:sp>
-      <p:sp>
-        <p:nvSpPr>
-          <p:cNvPr id="6" name="Rounded Rectangle 5"/>
-          <p:cNvSpPr/>
-          <p:nvPr/>
-        </p:nvSpPr>
-        <p:spPr>
-          <a:xfrm>
-            <a:off x="658368" y="1755648"/>
-            <a:ext cx="10874959" cy="3287268"/>
-          </a:xfrm>
-          <a:prstGeom prst="roundRect">
-            <a:avLst/>
-          </a:prstGeom>
-          <a:solidFill>
-            <a:srgbClr val="F1F2F4"/>
-          </a:solidFill>
-          <a:ln w="15240">
-            <a:solidFill>
-              <a:srgbClr val="C9CED5"/>
-            </a:solidFill>
-          </a:ln>
-          <a:effectLst/>
-        </p:spPr>
-        <p:style>
-          <a:lnRef idx="1">
-            <a:schemeClr val="accent1"/>
-          </a:lnRef>
-          <a:fillRef idx="3">
-            <a:schemeClr val="accent1"/>
-          </a:fillRef>
-          <a:effectRef idx="2">
-            <a:schemeClr val="accent1"/>
-          </a:effectRef>
-          <a:fontRef idx="minor">
-            <a:schemeClr val="lt1"/>
-          </a:fontRef>
-        </p:style>
-        <p:txBody>
-          <a:bodyPr rtlCol="0" anchor="ctr"/>
-          <a:lstStyle/>
-          <a:p>
-            <a:pPr algn="ctr"/>
-          </a:p>
-        </p:txBody>
-      </p:sp>
+      <p:pic>
+        <p:nvPicPr>
+          <p:cNvPr id="6" name="Picture 5" descr="grafana.png"/>
+          <p:cNvPicPr>
+            <a:picLocks noChangeAspect="1"/>
+          </p:cNvPicPr>
+          <p:nvPr/>
+        </p:nvPicPr>
+        <p:blipFill>
+          <a:blip r:embed="rId2"/>
+          <a:stretch>
+            <a:fillRect/>
+          </a:stretch>
+        </p:blipFill>
+        <p:spPr>
+          <a:xfrm>
+            <a:off x="2561210" y="1755648"/>
+            <a:ext cx="7069274" cy="4059936"/>
+          </a:xfrm>
+          <a:prstGeom prst="rect">
+            <a:avLst/>
+          </a:prstGeom>
+        </p:spPr>
+      </p:pic>
       <p:sp>
         <p:nvSpPr>
           <p:cNvPr id="7" name="TextBox 6"/>
@@ -18191,8 +18173,8 @@
         </p:nvSpPr>
         <p:spPr>
           <a:xfrm>
-            <a:off x="969264" y="1993392"/>
-            <a:ext cx="10253167" cy="2830068"/>
+            <a:off x="658368" y="5888736"/>
+            <a:ext cx="10874959" cy="310896"/>
           </a:xfrm>
           <a:prstGeom prst="rect">
             <a:avLst/>
@@ -18211,237 +18193,13 @@
               </a:spcBef>
             </a:pPr>
             <a:r>
-              <a:rPr sz="1100" b="0">
-                <a:solidFill>
-                  <a:srgbClr val="0B0B0B"/>
-                </a:solidFill>
-                <a:latin typeface="Consolas"/>
-              </a:rPr>
-              <a:t>SELECT * FROM speed.v_indicateur_fraicheur;</a:t>
-            </a:r>
-          </a:p>
-          <a:p>
-            <a:pPr algn="l">
-              <a:spcBef>
-                <a:spcPts val="0"/>
-              </a:spcBef>
-            </a:pPr>
-            <a:r>
-              <a:rPr sz="1100" b="0">
-                <a:solidFill>
-                  <a:srgbClr val="0B0B0B"/>
-                </a:solidFill>
-                <a:latin typeface="Consolas"/>
-              </a:rPr>
-              <a:t>     flux      |   derniere_collecte    | age_minutes | evenements_24h </a:t>
-            </a:r>
-          </a:p>
-          <a:p>
-            <a:pPr algn="l">
-              <a:spcBef>
-                <a:spcPts val="0"/>
-              </a:spcBef>
-            </a:pPr>
-            <a:r>
-              <a:rPr sz="1100" b="0">
-                <a:solidFill>
-                  <a:srgbClr val="0B0B0B"/>
-                </a:solidFill>
-                <a:latin typeface="Consolas"/>
-              </a:rPr>
-              <a:t>---------------+------------------------+-------------+----------------</a:t>
-            </a:r>
-          </a:p>
-          <a:p>
-            <a:pPr algn="l">
-              <a:spcBef>
-                <a:spcPts val="0"/>
-              </a:spcBef>
-            </a:pPr>
-            <a:r>
-              <a:rPr sz="1100" b="0">
-                <a:solidFill>
-                  <a:srgbClr val="0B0B0B"/>
-                </a:solidFill>
-                <a:latin typeface="Consolas"/>
-              </a:rPr>
-              <a:t> frequentation | 2026-09-01 08:45:01+00 |         0.8 |            405</a:t>
-            </a:r>
-          </a:p>
-          <a:p>
-            <a:pPr algn="l">
-              <a:spcBef>
-                <a:spcPts val="0"/>
-              </a:spcBef>
-            </a:pPr>
-            <a:r>
-              <a:rPr sz="1100" b="0">
-                <a:solidFill>
-                  <a:srgbClr val="0B0B0B"/>
-                </a:solidFill>
-                <a:latin typeface="Consolas"/>
-              </a:rPr>
-              <a:t> tarification  | 2026-09-01 06:36:54+00 |       128.9 |             15</a:t>
-            </a:r>
-          </a:p>
-          <a:p>
-            <a:pPr algn="l">
-              <a:spcBef>
-                <a:spcPts val="0"/>
-              </a:spcBef>
-            </a:pPr>
-            <a:r>
-              <a:rPr sz="1100" b="0">
-                <a:solidFill>
-                  <a:srgbClr val="0B0B0B"/>
-                </a:solidFill>
-                <a:latin typeface="Consolas"/>
-              </a:rPr>
-              <a:t>(2 rows)</a:t>
-            </a:r>
-          </a:p>
-          <a:p>
-            <a:pPr algn="l">
-              <a:spcBef>
-                <a:spcPts val="0"/>
-              </a:spcBef>
-            </a:pPr>
-            <a:r>
-              <a:rPr sz="1100" b="0">
-                <a:solidFill>
-                  <a:srgbClr val="0B0B0B"/>
-                </a:solidFill>
-                <a:latin typeface="Consolas"/>
-              </a:rPr>
-              <a:t>SELECT * FROM speed.v_indicateur_completude;</a:t>
-            </a:r>
-          </a:p>
-          <a:p>
-            <a:pPr algn="l">
-              <a:spcBef>
-                <a:spcPts val="0"/>
-              </a:spcBef>
-            </a:pPr>
-            <a:r>
-              <a:rPr sz="1100" b="0">
-                <a:solidFill>
-                  <a:srgbClr val="0B0B0B"/>
-                </a:solidFill>
-                <a:latin typeface="Consolas"/>
-              </a:rPr>
-              <a:t> titres_attendus | titres_collectes_24h | titres_manquants | taux_completude_pct </a:t>
-            </a:r>
-          </a:p>
-          <a:p>
-            <a:pPr algn="l">
-              <a:spcBef>
-                <a:spcPts val="0"/>
-              </a:spcBef>
-            </a:pPr>
-            <a:r>
-              <a:rPr sz="1100" b="0">
-                <a:solidFill>
-                  <a:srgbClr val="0B0B0B"/>
-                </a:solidFill>
-                <a:latin typeface="Consolas"/>
-              </a:rPr>
-              <a:t>-----------------+----------------------+------------------+---------------------</a:t>
-            </a:r>
-          </a:p>
-          <a:p>
-            <a:pPr algn="l">
-              <a:spcBef>
-                <a:spcPts val="0"/>
-              </a:spcBef>
-            </a:pPr>
-            <a:r>
-              <a:rPr sz="1100" b="0">
-                <a:solidFill>
-                  <a:srgbClr val="0B0B0B"/>
-                </a:solidFill>
-                <a:latin typeface="Consolas"/>
-              </a:rPr>
-              <a:t>              15 |                   15 |                0 |               100.0</a:t>
-            </a:r>
-          </a:p>
-          <a:p>
-            <a:pPr algn="l">
-              <a:spcBef>
-                <a:spcPts val="0"/>
-              </a:spcBef>
-            </a:pPr>
-            <a:r>
-              <a:rPr sz="1100" b="0">
-                <a:solidFill>
-                  <a:srgbClr val="0B0B0B"/>
-                </a:solidFill>
-                <a:latin typeface="Consolas"/>
-              </a:rPr>
-              <a:t>(1 row)</a:t>
-            </a:r>
-          </a:p>
-          <a:p>
-            <a:pPr algn="l">
-              <a:spcBef>
-                <a:spcPts val="0"/>
-              </a:spcBef>
-            </a:pPr>
-            <a:r>
-              <a:rPr sz="1100" b="0">
-                <a:solidFill>
-                  <a:srgbClr val="0B0B0B"/>
-                </a:solidFill>
-                <a:latin typeface="Consolas"/>
-              </a:rPr>
-              <a:t>SELECT * FROM speed.v_indicateur_latence;</a:t>
-            </a:r>
-          </a:p>
-          <a:p>
-            <a:pPr algn="l">
-              <a:spcBef>
-                <a:spcPts val="0"/>
-              </a:spcBef>
-            </a:pPr>
-            <a:r>
-              <a:rPr sz="1100" b="0">
-                <a:solidFill>
-                  <a:srgbClr val="0B0B0B"/>
-                </a:solidFill>
-                <a:latin typeface="Consolas"/>
-              </a:rPr>
-              <a:t> echantillon_24h | latence_moyenne_s | latence_max_s | latence_p95_s </a:t>
-            </a:r>
-          </a:p>
-          <a:p>
-            <a:pPr algn="l">
-              <a:spcBef>
-                <a:spcPts val="0"/>
-              </a:spcBef>
-            </a:pPr>
-            <a:r>
-              <a:rPr sz="1100" b="0">
-                <a:solidFill>
-                  <a:srgbClr val="0B0B0B"/>
-                </a:solidFill>
-                <a:latin typeface="Consolas"/>
-              </a:rPr>
-              <a:t>-----------------+-------------------+---------------+---------------</a:t>
-            </a:r>
-          </a:p>
-          <a:p>
-            <a:pPr algn="l">
-              <a:spcBef>
-                <a:spcPts val="0"/>
-              </a:spcBef>
-            </a:pPr>
-            <a:r>
-              <a:rPr sz="1100" b="0">
-                <a:solidFill>
-                  <a:srgbClr val="0B0B0B"/>
-                </a:solidFill>
-                <a:latin typeface="Consolas"/>
-              </a:rPr>
-              <a:t>             405 |             42.32 |         58.82 |         45.72</a:t>
+              <a:rPr sz="1300" b="0">
+                <a:solidFill>
+                  <a:srgbClr val="52514E"/>
+                </a:solidFill>
+                <a:latin typeface="Segoe UI"/>
+              </a:rPr>
+              <a:t>Capture du 01/09, docs/preuves/c19_supervision_indicateurs.txt</a:t>
             </a:r>
           </a:p>
         </p:txBody>
